--- a/Wuzu_Tokki_IP_소개서_20260922.pptx
+++ b/Wuzu_Tokki_IP_소개서_20260922.pptx
@@ -1700,54 +1700,39 @@
           </a:prstGeom>
         </p:spPr>
       </p:pic>
-      <p:sp>
-        <p:nvSpPr>
-          <p:cNvPr id="3" name="Text 0"/>
-          <p:cNvSpPr/>
-          <p:nvPr/>
-        </p:nvSpPr>
-        <p:spPr>
-          <a:xfrm>
-            <a:off x="822960" y="2331720"/>
-            <a:ext cx="2651760" cy="420624"/>
-          </a:xfrm>
-          <a:prstGeom prst="rect">
-            <a:avLst/>
-          </a:prstGeom>
-          <a:noFill/>
-          <a:ln/>
-        </p:spPr>
-        <p:txBody>
-          <a:bodyPr wrap="square" rtlCol="0" anchor="ctr"/>
-          <a:lstStyle/>
-          <a:p>
-            <a:pPr indent="0" marL="0">
-              <a:buNone/>
-            </a:pPr>
-            <a:r>
-              <a:rPr lang="en-US" sz="2400" spc="40" kern="0" dirty="0">
-                <a:solidFill>
-                  <a:srgbClr val="1A1A1A"/>
-                </a:solidFill>
-                <a:latin typeface="Noto Sans KR" pitchFamily="34" charset="0"/>
-                <a:ea typeface="Noto Sans KR" pitchFamily="34" charset="-122"/>
-                <a:cs typeface="Noto Sans KR" pitchFamily="34" charset="-120"/>
-              </a:rPr>
-              <a:t>wuzu tokki</a:t>
-            </a:r>
-            <a:endParaRPr lang="en-US" sz="2400" dirty="0"/>
-          </a:p>
-        </p:txBody>
-      </p:sp>
-      <p:sp>
-        <p:nvSpPr>
-          <p:cNvPr id="4" name="Text 1"/>
-          <p:cNvSpPr/>
-          <p:nvPr/>
-        </p:nvSpPr>
-        <p:spPr>
-          <a:xfrm>
-            <a:off x="822960" y="2798064"/>
+      <p:pic>
+        <p:nvPicPr>
+          <p:cNvPr id="3" name="Image 1" descr="/home/user/hoho/assets/logo-lockup.png">    </p:cNvPr>
+          <p:cNvPicPr>
+            <a:picLocks noChangeAspect="1"/>
+          </p:cNvPicPr>
+          <p:nvPr/>
+        </p:nvPicPr>
+        <p:blipFill>
+          <a:blip r:embed="rId2"/>
+          <a:stretch>
+            <a:fillRect/>
+          </a:stretch>
+        </p:blipFill>
+        <p:spPr>
+          <a:xfrm>
+            <a:off x="717356" y="2134627"/>
+            <a:ext cx="2753239" cy="769760"/>
+          </a:xfrm>
+          <a:prstGeom prst="rect">
+            <a:avLst/>
+          </a:prstGeom>
+        </p:spPr>
+      </p:pic>
+      <p:sp>
+        <p:nvSpPr>
+          <p:cNvPr id="4" name="Text 0"/>
+          <p:cNvSpPr/>
+          <p:nvPr/>
+        </p:nvSpPr>
+        <p:spPr>
+          <a:xfrm>
+            <a:off x="822960" y="2926749"/>
             <a:ext cx="2651760" cy="256032"/>
           </a:xfrm>
           <a:prstGeom prst="rect">
@@ -1780,13 +1765,13 @@
       </p:sp>
       <p:sp>
         <p:nvSpPr>
-          <p:cNvPr id="5" name="Shape 2"/>
-          <p:cNvSpPr/>
-          <p:nvPr/>
-        </p:nvSpPr>
-        <p:spPr>
-          <a:xfrm>
-            <a:off x="822960" y="3310128"/>
+          <p:cNvPr id="5" name="Shape 1"/>
+          <p:cNvSpPr/>
+          <p:nvPr/>
+        </p:nvSpPr>
+        <p:spPr>
+          <a:xfrm>
+            <a:off x="822960" y="3401568"/>
             <a:ext cx="457200" cy="5486"/>
           </a:xfrm>
           <a:prstGeom prst="rect">
@@ -1805,13 +1790,13 @@
       </p:sp>
       <p:sp>
         <p:nvSpPr>
-          <p:cNvPr id="6" name="Text 3"/>
-          <p:cNvSpPr/>
-          <p:nvPr/>
-        </p:nvSpPr>
-        <p:spPr>
-          <a:xfrm>
-            <a:off x="822960" y="3511296"/>
+          <p:cNvPr id="6" name="Text 2"/>
+          <p:cNvSpPr/>
+          <p:nvPr/>
+        </p:nvSpPr>
+        <p:spPr>
+          <a:xfrm>
+            <a:off x="822960" y="3602736"/>
             <a:ext cx="2651760" cy="548640"/>
           </a:xfrm>
           <a:prstGeom prst="rect">
@@ -1862,45 +1847,6 @@
               <a:t>이루어진 토끼들</a:t>
             </a:r>
             <a:endParaRPr lang="en-US" sz="1000" dirty="0"/>
-          </a:p>
-        </p:txBody>
-      </p:sp>
-      <p:sp>
-        <p:nvSpPr>
-          <p:cNvPr id="7" name="Text 4"/>
-          <p:cNvSpPr/>
-          <p:nvPr/>
-        </p:nvSpPr>
-        <p:spPr>
-          <a:xfrm>
-            <a:off x="822960" y="6309360"/>
-            <a:ext cx="2651760" cy="219456"/>
-          </a:xfrm>
-          <a:prstGeom prst="rect">
-            <a:avLst/>
-          </a:prstGeom>
-          <a:noFill/>
-          <a:ln/>
-        </p:spPr>
-        <p:txBody>
-          <a:bodyPr wrap="square" rtlCol="0" anchor="ctr"/>
-          <a:lstStyle/>
-          <a:p>
-            <a:pPr indent="0" marL="0">
-              <a:buNone/>
-            </a:pPr>
-            <a:r>
-              <a:rPr lang="en-US" sz="750" spc="260" kern="0" dirty="0">
-                <a:solidFill>
-                  <a:srgbClr val="9A9A9A"/>
-                </a:solidFill>
-                <a:latin typeface="Noto Sans KR" pitchFamily="34" charset="0"/>
-                <a:ea typeface="Noto Sans KR" pitchFamily="34" charset="-122"/>
-                <a:cs typeface="Noto Sans KR" pitchFamily="34" charset="-120"/>
-              </a:rPr>
-              <a:t>character ip</a:t>
-            </a:r>
-            <a:endParaRPr lang="en-US" sz="750" dirty="0"/>
           </a:p>
         </p:txBody>
       </p:sp>
@@ -2060,7 +2006,7 @@
                 <a:ea typeface="Noto Sans KR" pitchFamily="34" charset="-122"/>
                 <a:cs typeface="Noto Sans KR" pitchFamily="34" charset="-120"/>
               </a:rPr>
-              <a:t>서로 다른 물질로 이루어진</a:t>
+              <a:t>서로 다른 물질로 이루어진 우주토끼들이</a:t>
             </a:r>
             <a:endParaRPr lang="en-US" sz="950" dirty="0"/>
           </a:p>
@@ -2080,10 +2026,32 @@
                 <a:ea typeface="Noto Sans KR" pitchFamily="34" charset="-122"/>
                 <a:cs typeface="Noto Sans KR" pitchFamily="34" charset="-120"/>
               </a:rPr>
-              <a:t>우주토끼들은 우리에게</a:t>
+              <a:t>하나의 질문을 건넵니다.</a:t>
             </a:r>
             <a:endParaRPr lang="en-US" sz="950" dirty="0"/>
           </a:p>
+        </p:txBody>
+      </p:sp>
+      <p:sp>
+        <p:nvSpPr>
+          <p:cNvPr id="6" name="Text 3"/>
+          <p:cNvSpPr/>
+          <p:nvPr/>
+        </p:nvSpPr>
+        <p:spPr>
+          <a:xfrm>
+            <a:off x="8686800" y="3200400"/>
+            <a:ext cx="2697480" cy="1097280"/>
+          </a:xfrm>
+          <a:prstGeom prst="rect">
+            <a:avLst/>
+          </a:prstGeom>
+          <a:noFill/>
+          <a:ln/>
+        </p:spPr>
+        <p:txBody>
+          <a:bodyPr wrap="square" rtlCol="0" anchor="ctr"/>
+          <a:lstStyle/>
           <a:p>
             <a:pPr indent="0" marL="0">
               <a:lnSpc>
@@ -2094,38 +2062,16 @@
             <a:r>
               <a:rPr lang="en-US" sz="950" dirty="0">
                 <a:solidFill>
-                  <a:srgbClr val="5A5A5A"/>
-                </a:solidFill>
-                <a:latin typeface="Noto Sans KR" pitchFamily="34" charset="0"/>
-                <a:ea typeface="Noto Sans KR" pitchFamily="34" charset="-122"/>
-                <a:cs typeface="Noto Sans KR" pitchFamily="34" charset="-120"/>
-              </a:rPr>
-              <a:t>하나의 질문을 건넵니다.</a:t>
+                  <a:srgbClr val="1A1A1A"/>
+                </a:solidFill>
+                <a:latin typeface="Noto Sans KR" pitchFamily="34" charset="0"/>
+                <a:ea typeface="Noto Sans KR" pitchFamily="34" charset="-122"/>
+                <a:cs typeface="Noto Sans KR" pitchFamily="34" charset="-120"/>
+              </a:rPr>
+              <a:t>나는 어떤 성질을 지녔는지,</a:t>
             </a:r>
             <a:endParaRPr lang="en-US" sz="950" dirty="0"/>
           </a:p>
-        </p:txBody>
-      </p:sp>
-      <p:sp>
-        <p:nvSpPr>
-          <p:cNvPr id="6" name="Text 3"/>
-          <p:cNvSpPr/>
-          <p:nvPr/>
-        </p:nvSpPr>
-        <p:spPr>
-          <a:xfrm>
-            <a:off x="8686800" y="3364992"/>
-            <a:ext cx="2697480" cy="1097280"/>
-          </a:xfrm>
-          <a:prstGeom prst="rect">
-            <a:avLst/>
-          </a:prstGeom>
-          <a:noFill/>
-          <a:ln/>
-        </p:spPr>
-        <p:txBody>
-          <a:bodyPr wrap="square" rtlCol="0" anchor="ctr"/>
-          <a:lstStyle/>
           <a:p>
             <a:pPr indent="0" marL="0">
               <a:lnSpc>
@@ -2142,7 +2088,7 @@
                 <a:ea typeface="Noto Sans KR" pitchFamily="34" charset="-122"/>
                 <a:cs typeface="Noto Sans KR" pitchFamily="34" charset="-120"/>
               </a:rPr>
-              <a:t>나는 어떤 성질을 가지고 있는지,</a:t>
+              <a:t>어떤 흔적을 품고 있는지,</a:t>
             </a:r>
             <a:endParaRPr lang="en-US" sz="950" dirty="0"/>
           </a:p>
@@ -2162,47 +2108,7 @@
                 <a:ea typeface="Noto Sans KR" pitchFamily="34" charset="-122"/>
                 <a:cs typeface="Noto Sans KR" pitchFamily="34" charset="-120"/>
               </a:rPr>
-              <a:t>어떤 흔적을 품고 있는지,</a:t>
-            </a:r>
-            <a:endParaRPr lang="en-US" sz="950" dirty="0"/>
-          </a:p>
-          <a:p>
-            <a:pPr indent="0" marL="0">
-              <a:lnSpc>
-                <a:spcPts val="1700"/>
-              </a:lnSpc>
-              <a:buNone/>
-            </a:pPr>
-            <a:r>
-              <a:rPr lang="en-US" sz="950" dirty="0">
-                <a:solidFill>
-                  <a:srgbClr val="1A1A1A"/>
-                </a:solidFill>
-                <a:latin typeface="Noto Sans KR" pitchFamily="34" charset="0"/>
-                <a:ea typeface="Noto Sans KR" pitchFamily="34" charset="-122"/>
-                <a:cs typeface="Noto Sans KR" pitchFamily="34" charset="-120"/>
-              </a:rPr>
-              <a:t>그리고 어떤 모습으로</a:t>
-            </a:r>
-            <a:endParaRPr lang="en-US" sz="950" dirty="0"/>
-          </a:p>
-          <a:p>
-            <a:pPr indent="0" marL="0">
-              <a:lnSpc>
-                <a:spcPts val="1700"/>
-              </a:lnSpc>
-              <a:buNone/>
-            </a:pPr>
-            <a:r>
-              <a:rPr lang="en-US" sz="950" dirty="0">
-                <a:solidFill>
-                  <a:srgbClr val="1A1A1A"/>
-                </a:solidFill>
-                <a:latin typeface="Noto Sans KR" pitchFamily="34" charset="0"/>
-                <a:ea typeface="Noto Sans KR" pitchFamily="34" charset="-122"/>
-                <a:cs typeface="Noto Sans KR" pitchFamily="34" charset="-120"/>
-              </a:rPr>
-              <a:t>변해가고 있는지.</a:t>
+              <a:t>어떤 모습으로 변해가는지.</a:t>
             </a:r>
             <a:endParaRPr lang="en-US" sz="950" dirty="0"/>
           </a:p>
@@ -2272,45 +2178,30 @@
           </a:p>
         </p:txBody>
       </p:sp>
-      <p:sp>
-        <p:nvSpPr>
-          <p:cNvPr id="9" name="Text 6"/>
-          <p:cNvSpPr/>
-          <p:nvPr/>
-        </p:nvSpPr>
-        <p:spPr>
-          <a:xfrm>
-            <a:off x="8686800" y="5779008"/>
-            <a:ext cx="2697480" cy="219456"/>
-          </a:xfrm>
-          <a:prstGeom prst="rect">
-            <a:avLst/>
-          </a:prstGeom>
-          <a:noFill/>
-          <a:ln/>
-        </p:spPr>
-        <p:txBody>
-          <a:bodyPr wrap="square" rtlCol="0" anchor="ctr"/>
-          <a:lstStyle/>
-          <a:p>
-            <a:pPr indent="0" marL="0">
-              <a:buNone/>
-            </a:pPr>
-            <a:r>
-              <a:rPr lang="en-US" sz="750" spc="160" kern="0" dirty="0">
-                <a:solidFill>
-                  <a:srgbClr val="9A9A9A"/>
-                </a:solidFill>
-                <a:latin typeface="Noto Sans KR" pitchFamily="34" charset="0"/>
-                <a:ea typeface="Noto Sans KR" pitchFamily="34" charset="-122"/>
-                <a:cs typeface="Noto Sans KR" pitchFamily="34" charset="-120"/>
-              </a:rPr>
-              <a:t>wuzu tokki · 우주토끼</a:t>
-            </a:r>
-            <a:endParaRPr lang="en-US" sz="750" dirty="0"/>
-          </a:p>
-        </p:txBody>
-      </p:sp>
+      <p:pic>
+        <p:nvPicPr>
+          <p:cNvPr id="9" name="Image 1" descr="/home/user/hoho/assets/logo-lockup.png">    </p:cNvPr>
+          <p:cNvPicPr>
+            <a:picLocks noChangeAspect="1"/>
+          </p:cNvPicPr>
+          <p:nvPr/>
+        </p:nvPicPr>
+        <p:blipFill>
+          <a:blip r:embed="rId2"/>
+          <a:stretch>
+            <a:fillRect/>
+          </a:stretch>
+        </p:blipFill>
+        <p:spPr>
+          <a:xfrm>
+            <a:off x="8631719" y="5650749"/>
+            <a:ext cx="1436042" cy="401493"/>
+          </a:xfrm>
+          <a:prstGeom prst="rect">
+            <a:avLst/>
+          </a:prstGeom>
+        </p:spPr>
+      </p:pic>
     </p:spTree>
   </p:cSld>
   <p:clrMapOvr>
@@ -2447,7 +2338,7 @@
         <p:spPr>
           <a:xfrm>
             <a:off x="822960" y="1572768"/>
-            <a:ext cx="7863840" cy="1066800"/>
+            <a:ext cx="7863840" cy="800100"/>
           </a:xfrm>
           <a:prstGeom prst="rect">
             <a:avLst/>
@@ -2514,27 +2405,7 @@
                 <a:ea typeface="Noto Sans KR" pitchFamily="34" charset="-122"/>
                 <a:cs typeface="Noto Sans KR" pitchFamily="34" charset="-120"/>
               </a:rPr>
-              <a:t>같은 토끼의 형태를 가지고 있지만</a:t>
-            </a:r>
-            <a:endParaRPr lang="en-US" sz="1050" dirty="0"/>
-          </a:p>
-          <a:p>
-            <a:pPr indent="0" marL="0">
-              <a:lnSpc>
-                <a:spcPts val="2100"/>
-              </a:lnSpc>
-              <a:buNone/>
-            </a:pPr>
-            <a:r>
-              <a:rPr lang="en-US" sz="1050" dirty="0">
-                <a:solidFill>
-                  <a:srgbClr val="5A5A5A"/>
-                </a:solidFill>
-                <a:latin typeface="Noto Sans KR" pitchFamily="34" charset="0"/>
-                <a:ea typeface="Noto Sans KR" pitchFamily="34" charset="-122"/>
-                <a:cs typeface="Noto Sans KR" pitchFamily="34" charset="-120"/>
-              </a:rPr>
-              <a:t>각자가 가진 촉감과 무게, 흔적과 변화는 모두 다릅니다.</a:t>
+              <a:t>형태는 같지만, 촉감과 무게와 흔적은 저마다 다릅니다.</a:t>
             </a:r>
             <a:endParaRPr lang="en-US" sz="1050" dirty="0"/>
           </a:p>
@@ -2825,7 +2696,7 @@
                 <a:ea typeface="Noto Sans KR" pitchFamily="34" charset="-122"/>
                 <a:cs typeface="Noto Sans KR" pitchFamily="34" charset="-120"/>
               </a:rPr>
-              <a:t>어떤 물질은 오랜 시간 흔적을 품습니다.</a:t>
+              <a:t>어떤 물질은 오래 흔적을 품습니다.</a:t>
             </a:r>
             <a:endParaRPr lang="en-US" sz="1150" dirty="0"/>
           </a:p>
@@ -2845,7 +2716,7 @@
                 <a:ea typeface="Noto Sans KR" pitchFamily="34" charset="-122"/>
                 <a:cs typeface="Noto Sans KR" pitchFamily="34" charset="-120"/>
               </a:rPr>
-              <a:t>어떤 것은 흩어졌다가 다시 모이고,</a:t>
+              <a:t>어떤 것은 흩어졌다 다시 모이고,</a:t>
             </a:r>
             <a:endParaRPr lang="en-US" sz="1150" dirty="0"/>
           </a:p>
@@ -2865,7 +2736,7 @@
                 <a:ea typeface="Noto Sans KR" pitchFamily="34" charset="-122"/>
                 <a:cs typeface="Noto Sans KR" pitchFamily="34" charset="-120"/>
               </a:rPr>
-              <a:t>어떤 것은 단단하지만 작은 균열을 가지고 있습니다.</a:t>
+              <a:t>어떤 것은 단단한 채로 작은 균열을 지닙니다.</a:t>
             </a:r>
             <a:endParaRPr lang="en-US" sz="1150" dirty="0"/>
           </a:p>
@@ -2880,7 +2751,7 @@
         <p:spPr>
           <a:xfrm>
             <a:off x="822960" y="3611880"/>
-            <a:ext cx="5852160" cy="508000"/>
+            <a:ext cx="6766560" cy="254000"/>
           </a:xfrm>
           <a:prstGeom prst="rect">
             <a:avLst/>
@@ -2907,27 +2778,7 @@
                 <a:ea typeface="Noto Sans KR" pitchFamily="34" charset="-122"/>
                 <a:cs typeface="Noto Sans KR" pitchFamily="34" charset="-120"/>
               </a:rPr>
-              <a:t>우주토끼는 물질의 성질을 통해</a:t>
-            </a:r>
-            <a:endParaRPr lang="en-US" sz="1000" dirty="0"/>
-          </a:p>
-          <a:p>
-            <a:pPr indent="0" marL="0">
-              <a:lnSpc>
-                <a:spcPts val="2000"/>
-              </a:lnSpc>
-              <a:buNone/>
-            </a:pPr>
-            <a:r>
-              <a:rPr lang="en-US" sz="1000" dirty="0">
-                <a:solidFill>
-                  <a:srgbClr val="5A5A5A"/>
-                </a:solidFill>
-                <a:latin typeface="Noto Sans KR" pitchFamily="34" charset="0"/>
-                <a:ea typeface="Noto Sans KR" pitchFamily="34" charset="-122"/>
-                <a:cs typeface="Noto Sans KR" pitchFamily="34" charset="-120"/>
-              </a:rPr>
-              <a:t>우리가 가진 서로 다른 모습을 바라봅니다.</a:t>
+              <a:t>우주토끼는 그 성질로 우리의 서로 다른 모습을 바라봅니다.</a:t>
             </a:r>
             <a:endParaRPr lang="en-US" sz="1000" dirty="0"/>
           </a:p>
@@ -3348,7 +3199,7 @@
                 <a:ea typeface="Noto Sans KR" pitchFamily="34" charset="-122"/>
                 <a:cs typeface="Noto Sans KR" pitchFamily="34" charset="-120"/>
               </a:rPr>
-              <a:t>안정적으로 바닥에 닿는 배와 발</a:t>
+              <a:t>바닥에 안정적으로 닿는 배와 발</a:t>
             </a:r>
             <a:endParaRPr lang="en-US" sz="900" dirty="0"/>
           </a:p>
@@ -3476,7 +3327,7 @@
                 <a:ea typeface="Noto Sans KR" pitchFamily="34" charset="-122"/>
                 <a:cs typeface="Noto Sans KR" pitchFamily="34" charset="-120"/>
               </a:rPr>
-              <a:t>반드시 존재하는 귀와 꼬리</a:t>
+              <a:t>언제나 있는 귀와 꼬리</a:t>
             </a:r>
             <a:endParaRPr lang="en-US" sz="900" dirty="0"/>
           </a:p>
@@ -3668,7 +3519,7 @@
                 <a:ea typeface="Noto Sans KR" pitchFamily="34" charset="-122"/>
                 <a:cs typeface="Noto Sans KR" pitchFamily="34" charset="-120"/>
               </a:rPr>
-              <a:t>장식보다 재료 자체의 특징을 우선</a:t>
+              <a:t>장식보다 재료의 특징을 우선</a:t>
             </a:r>
             <a:endParaRPr lang="en-US" sz="900" dirty="0"/>
           </a:p>
@@ -3992,7 +3843,7 @@
                 <a:ea typeface="Noto Sans KR" pitchFamily="34" charset="-122"/>
                 <a:cs typeface="Noto Sans KR" pitchFamily="34" charset="-120"/>
               </a:rPr>
-              <a:t>길게 자란 털이 몸의 윤곽을 부드럽게 덮습니다.</a:t>
+              <a:t>길게 자란 털이 몸의 윤곽을 덮습니다.</a:t>
             </a:r>
             <a:endParaRPr lang="en-US" sz="850" dirty="0"/>
           </a:p>
@@ -4034,7 +3885,7 @@
                 <a:ea typeface="Noto Sans KR" pitchFamily="34" charset="-122"/>
                 <a:cs typeface="Noto Sans KR" pitchFamily="34" charset="-120"/>
               </a:rPr>
-              <a:t>나는 서로 다른 사람들 사이를 잇는 자리에 서 있을까요?</a:t>
+              <a:t>나는 사람들 사이를 잇는 자리에 서 있을까요?</a:t>
             </a:r>
             <a:endParaRPr lang="en-US" sz="850" dirty="0"/>
           </a:p>
@@ -4129,7 +3980,7 @@
                 <a:ea typeface="Noto Sans KR" pitchFamily="34" charset="-122"/>
                 <a:cs typeface="Noto Sans KR" pitchFamily="34" charset="-120"/>
               </a:rPr>
-              <a:t>회백색 표면 위에 크고 작은 분화구가 남아 있습니다.</a:t>
+              <a:t>회백색 표면에 크고 작은 분화구가 남아 있습니다.</a:t>
             </a:r>
             <a:endParaRPr lang="en-US" sz="850" dirty="0"/>
           </a:p>
@@ -4171,7 +4022,7 @@
                 <a:ea typeface="Noto Sans KR" pitchFamily="34" charset="-122"/>
                 <a:cs typeface="Noto Sans KR" pitchFamily="34" charset="-120"/>
               </a:rPr>
-              <a:t>나는 지나온 시간의 흔적을 오래 간직하는 편일까요?</a:t>
+              <a:t>나는 지나온 흔적을 오래 간직하는 편일까요?</a:t>
             </a:r>
             <a:endParaRPr lang="en-US" sz="850" dirty="0"/>
           </a:p>
@@ -4266,7 +4117,7 @@
                 <a:ea typeface="Noto Sans KR" pitchFamily="34" charset="-122"/>
                 <a:cs typeface="Noto Sans KR" pitchFamily="34" charset="-120"/>
               </a:rPr>
-              <a:t>희고 푸른 기가 도는 몸이 덩어리처럼 뭉쳐 있습니다.</a:t>
+              <a:t>희고 푸른 기가 도는 몸이 덩어리로 뭉쳐 있습니다.</a:t>
             </a:r>
             <a:endParaRPr lang="en-US" sz="850" dirty="0"/>
           </a:p>
@@ -4445,7 +4296,7 @@
                 <a:ea typeface="Noto Sans KR" pitchFamily="34" charset="-122"/>
                 <a:cs typeface="Noto Sans KR" pitchFamily="34" charset="-120"/>
               </a:rPr>
-              <a:t>나는 눌린 자리에서 새로운 모양이 되는 편일까요?</a:t>
+              <a:t>나는 눌린 자리에서 새 모양이 되는 편일까요?</a:t>
             </a:r>
             <a:endParaRPr lang="en-US" sz="850" dirty="0"/>
           </a:p>
@@ -4540,7 +4391,7 @@
                 <a:ea typeface="Noto Sans KR" pitchFamily="34" charset="-122"/>
                 <a:cs typeface="Noto Sans KR" pitchFamily="34" charset="-120"/>
               </a:rPr>
-              <a:t>단단하게 굳은 표면 안쪽으로 가는 결이 지나갑니다.</a:t>
+              <a:t>단단히 굳은 표면 안쪽으로 가는 결이 지나갑니다.</a:t>
             </a:r>
             <a:endParaRPr lang="en-US" sz="850" dirty="0"/>
           </a:p>
@@ -4582,7 +4433,7 @@
                 <a:ea typeface="Noto Sans KR" pitchFamily="34" charset="-122"/>
                 <a:cs typeface="Noto Sans KR" pitchFamily="34" charset="-120"/>
               </a:rPr>
-              <a:t>나는 단단해 보이는 안쪽에 어떤 결을 품고 있을까요?</a:t>
+              <a:t>나는 단단한 겉 안쪽에 어떤 결을 품고 있을까요?</a:t>
             </a:r>
             <a:endParaRPr lang="en-US" sz="850" dirty="0"/>
           </a:p>
@@ -6885,7 +6736,7 @@
                 <a:ea typeface="Noto Sans KR" pitchFamily="34" charset="-122"/>
                 <a:cs typeface="Noto Sans KR" pitchFamily="34" charset="-120"/>
               </a:rPr>
-              <a:t>같은 형태를 공유하지만, 차이는 색이 아니라 표면과 실루엣에서 먼저 드러납니다.</a:t>
+              <a:t>차이는 색이 아니라 표면과 실루엣에서 먼저 드러납니다.</a:t>
             </a:r>
             <a:endParaRPr lang="en-US" sz="900" dirty="0"/>
           </a:p>
@@ -7154,7 +7005,7 @@
                 <a:ea typeface="Noto Sans KR" pitchFamily="34" charset="-122"/>
                 <a:cs typeface="Noto Sans KR" pitchFamily="34" charset="-120"/>
               </a:rPr>
-              <a:t>아이보리 기가 남아 있는 부드러운 색감</a:t>
+              <a:t>아이보리 기가 남은 부드러운 색감</a:t>
             </a:r>
             <a:endParaRPr lang="en-US" sz="850" dirty="0"/>
           </a:p>
@@ -7410,7 +7261,7 @@
                 <a:ea typeface="Noto Sans KR" pitchFamily="34" charset="-122"/>
                 <a:cs typeface="Noto Sans KR" pitchFamily="34" charset="-120"/>
               </a:rPr>
-              <a:t>최소한으로 절제한 하이라이트</a:t>
+              <a:t>절제한 하이라이트</a:t>
             </a:r>
             <a:endParaRPr lang="en-US" sz="850" dirty="0"/>
           </a:p>
@@ -7538,7 +7389,7 @@
                 <a:ea typeface="Noto Sans KR" pitchFamily="34" charset="-122"/>
                 <a:cs typeface="Noto Sans KR" pitchFamily="34" charset="-120"/>
               </a:rPr>
-              <a:t>표면이 흔들리지 않는 정돈된 마감</a:t>
+              <a:t>흔들림 없는 정돈된 마감</a:t>
             </a:r>
             <a:endParaRPr lang="en-US" sz="850" dirty="0"/>
           </a:p>
@@ -7602,7 +7453,7 @@
                 <a:ea typeface="Noto Sans KR" pitchFamily="34" charset="-122"/>
                 <a:cs typeface="Noto Sans KR" pitchFamily="34" charset="-120"/>
               </a:rPr>
-              <a:t>사실적이지 않으면서 물성은 남는 표현</a:t>
+              <a:t>사실적이지 않아도 물성은 남는 표현</a:t>
             </a:r>
             <a:endParaRPr lang="en-US" sz="850" dirty="0"/>
           </a:p>
@@ -7795,7 +7646,7 @@
                 <a:ea typeface="Noto Sans KR" pitchFamily="34" charset="-122"/>
                 <a:cs typeface="Noto Sans KR" pitchFamily="34" charset="-120"/>
               </a:rPr>
-              <a:t>캐릭터의 수를 늘리는 방식이 아니라, 새로운 물질을 만날 때마다</a:t>
+              <a:t>캐릭터를 늘리는 게 아니라, 새로운 물질을 만날 때마다</a:t>
             </a:r>
             <a:endParaRPr lang="en-US" sz="1000" dirty="0"/>
           </a:p>
@@ -7815,7 +7666,7 @@
                 <a:ea typeface="Noto Sans KR" pitchFamily="34" charset="-122"/>
                 <a:cs typeface="Noto Sans KR" pitchFamily="34" charset="-120"/>
               </a:rPr>
-              <a:t>세계가 한 겹씩 넓어지는 구조입니다.</a:t>
+              <a:t>세계가 한 겹씩 넓어집니다.</a:t>
             </a:r>
             <a:endParaRPr lang="en-US" sz="1000" dirty="0"/>
           </a:p>
@@ -8519,7 +8370,7 @@
                 <a:ea typeface="Noto Sans KR" pitchFamily="34" charset="-122"/>
                 <a:cs typeface="Noto Sans KR" pitchFamily="34" charset="-120"/>
               </a:rPr>
-              <a:t>확정된 제품 계획이 아니라, 앞으로 탐구할 수 있는 물질의 방향입니다.</a:t>
+              <a:t>확정된 계획이 아니라, 앞으로 탐구할 수 있는 방향입니다.</a:t>
             </a:r>
             <a:endParaRPr lang="en-US" sz="900" dirty="0"/>
           </a:p>
